--- a/docs/assets/images/logo.pptx
+++ b/docs/assets/images/logo.pptx
@@ -12,6 +12,7 @@
     <p:sldId id="257" r:id="rId6"/>
     <p:sldId id="261" r:id="rId7"/>
     <p:sldId id="262" r:id="rId8"/>
+    <p:sldId id="263" r:id="rId9"/>
   </p:sldIdLst>
   <p:sldSz cx="12192000" cy="6858000"/>
   <p:notesSz cx="6858000" cy="9144000"/>
@@ -265,7 +266,7 @@
           <a:p>
             <a:fld id="{E758D935-2A79-4701-B355-AD37FE9E3A0D}" type="datetimeFigureOut">
               <a:rPr kumimoji="1" lang="ja-JP" altLang="en-US" smtClean="0"/>
-              <a:t>2024/8/7</a:t>
+              <a:t>2026/2/17</a:t>
             </a:fld>
             <a:endParaRPr kumimoji="1" lang="ja-JP" altLang="en-US"/>
           </a:p>
@@ -495,7 +496,7 @@
           <a:p>
             <a:fld id="{E758D935-2A79-4701-B355-AD37FE9E3A0D}" type="datetimeFigureOut">
               <a:rPr kumimoji="1" lang="ja-JP" altLang="en-US" smtClean="0"/>
-              <a:t>2024/8/7</a:t>
+              <a:t>2026/2/17</a:t>
             </a:fld>
             <a:endParaRPr kumimoji="1" lang="ja-JP" altLang="en-US"/>
           </a:p>
@@ -735,7 +736,7 @@
           <a:p>
             <a:fld id="{E758D935-2A79-4701-B355-AD37FE9E3A0D}" type="datetimeFigureOut">
               <a:rPr kumimoji="1" lang="ja-JP" altLang="en-US" smtClean="0"/>
-              <a:t>2024/8/7</a:t>
+              <a:t>2026/2/17</a:t>
             </a:fld>
             <a:endParaRPr kumimoji="1" lang="ja-JP" altLang="en-US"/>
           </a:p>
@@ -965,7 +966,7 @@
           <a:p>
             <a:fld id="{E758D935-2A79-4701-B355-AD37FE9E3A0D}" type="datetimeFigureOut">
               <a:rPr kumimoji="1" lang="ja-JP" altLang="en-US" smtClean="0"/>
-              <a:t>2024/8/7</a:t>
+              <a:t>2026/2/17</a:t>
             </a:fld>
             <a:endParaRPr kumimoji="1" lang="ja-JP" altLang="en-US"/>
           </a:p>
@@ -1240,7 +1241,7 @@
           <a:p>
             <a:fld id="{E758D935-2A79-4701-B355-AD37FE9E3A0D}" type="datetimeFigureOut">
               <a:rPr kumimoji="1" lang="ja-JP" altLang="en-US" smtClean="0"/>
-              <a:t>2024/8/7</a:t>
+              <a:t>2026/2/17</a:t>
             </a:fld>
             <a:endParaRPr kumimoji="1" lang="ja-JP" altLang="en-US"/>
           </a:p>
@@ -1569,7 +1570,7 @@
           <a:p>
             <a:fld id="{E758D935-2A79-4701-B355-AD37FE9E3A0D}" type="datetimeFigureOut">
               <a:rPr kumimoji="1" lang="ja-JP" altLang="en-US" smtClean="0"/>
-              <a:t>2024/8/7</a:t>
+              <a:t>2026/2/17</a:t>
             </a:fld>
             <a:endParaRPr kumimoji="1" lang="ja-JP" altLang="en-US"/>
           </a:p>
@@ -2045,7 +2046,7 @@
           <a:p>
             <a:fld id="{E758D935-2A79-4701-B355-AD37FE9E3A0D}" type="datetimeFigureOut">
               <a:rPr kumimoji="1" lang="ja-JP" altLang="en-US" smtClean="0"/>
-              <a:t>2024/8/7</a:t>
+              <a:t>2026/2/17</a:t>
             </a:fld>
             <a:endParaRPr kumimoji="1" lang="ja-JP" altLang="en-US"/>
           </a:p>
@@ -2186,7 +2187,7 @@
           <a:p>
             <a:fld id="{E758D935-2A79-4701-B355-AD37FE9E3A0D}" type="datetimeFigureOut">
               <a:rPr kumimoji="1" lang="ja-JP" altLang="en-US" smtClean="0"/>
-              <a:t>2024/8/7</a:t>
+              <a:t>2026/2/17</a:t>
             </a:fld>
             <a:endParaRPr kumimoji="1" lang="ja-JP" altLang="en-US"/>
           </a:p>
@@ -2299,7 +2300,7 @@
           <a:p>
             <a:fld id="{E758D935-2A79-4701-B355-AD37FE9E3A0D}" type="datetimeFigureOut">
               <a:rPr kumimoji="1" lang="ja-JP" altLang="en-US" smtClean="0"/>
-              <a:t>2024/8/7</a:t>
+              <a:t>2026/2/17</a:t>
             </a:fld>
             <a:endParaRPr kumimoji="1" lang="ja-JP" altLang="en-US"/>
           </a:p>
@@ -2642,7 +2643,7 @@
           <a:p>
             <a:fld id="{E758D935-2A79-4701-B355-AD37FE9E3A0D}" type="datetimeFigureOut">
               <a:rPr kumimoji="1" lang="ja-JP" altLang="en-US" smtClean="0"/>
-              <a:t>2024/8/7</a:t>
+              <a:t>2026/2/17</a:t>
             </a:fld>
             <a:endParaRPr kumimoji="1" lang="ja-JP" altLang="en-US"/>
           </a:p>
@@ -2930,7 +2931,7 @@
           <a:p>
             <a:fld id="{E758D935-2A79-4701-B355-AD37FE9E3A0D}" type="datetimeFigureOut">
               <a:rPr kumimoji="1" lang="ja-JP" altLang="en-US" smtClean="0"/>
-              <a:t>2024/8/7</a:t>
+              <a:t>2026/2/17</a:t>
             </a:fld>
             <a:endParaRPr kumimoji="1" lang="ja-JP" altLang="en-US"/>
           </a:p>
@@ -3203,7 +3204,7 @@
           <a:p>
             <a:fld id="{E758D935-2A79-4701-B355-AD37FE9E3A0D}" type="datetimeFigureOut">
               <a:rPr kumimoji="1" lang="ja-JP" altLang="en-US" smtClean="0"/>
-              <a:t>2024/8/7</a:t>
+              <a:t>2026/2/17</a:t>
             </a:fld>
             <a:endParaRPr kumimoji="1" lang="ja-JP" altLang="en-US"/>
           </a:p>
@@ -4803,6 +4804,230 @@
 </p:sld>
 </file>
 
+<file path=ppt/slides/slide8.xml><?xml version="1.0" encoding="utf-8"?>
+<p:sld xmlns:a="http://schemas.openxmlformats.org/drawingml/2006/main" xmlns:r="http://schemas.openxmlformats.org/officeDocument/2006/relationships" xmlns:p="http://schemas.openxmlformats.org/presentationml/2006/main">
+  <p:cSld>
+    <p:spTree>
+      <p:nvGrpSpPr>
+        <p:cNvPr id="1" name=""/>
+        <p:cNvGrpSpPr/>
+        <p:nvPr/>
+      </p:nvGrpSpPr>
+      <p:grpSpPr>
+        <a:xfrm>
+          <a:off x="0" y="0"/>
+          <a:ext cx="0" cy="0"/>
+          <a:chOff x="0" y="0"/>
+          <a:chExt cx="0" cy="0"/>
+        </a:xfrm>
+      </p:grpSpPr>
+      <p:grpSp>
+        <p:nvGrpSpPr>
+          <p:cNvPr id="10" name="グループ化 9">
+            <a:extLst>
+              <a:ext uri="{FF2B5EF4-FFF2-40B4-BE49-F238E27FC236}">
+                <a16:creationId xmlns:a16="http://schemas.microsoft.com/office/drawing/2014/main" id="{E530C160-17CE-75BB-DCFA-EC4E194021F2}"/>
+              </a:ext>
+            </a:extLst>
+          </p:cNvPr>
+          <p:cNvGrpSpPr/>
+          <p:nvPr/>
+        </p:nvGrpSpPr>
+        <p:grpSpPr>
+          <a:xfrm>
+            <a:off x="0" y="963168"/>
+            <a:ext cx="12192000" cy="4931664"/>
+            <a:chOff x="0" y="963168"/>
+            <a:chExt cx="12192000" cy="4931664"/>
+          </a:xfrm>
+        </p:grpSpPr>
+        <p:pic>
+          <p:nvPicPr>
+            <p:cNvPr id="5" name="図 4">
+              <a:extLst>
+                <a:ext uri="{FF2B5EF4-FFF2-40B4-BE49-F238E27FC236}">
+                  <a16:creationId xmlns:a16="http://schemas.microsoft.com/office/drawing/2014/main" id="{29324A8A-3788-C544-D187-5EF7297D59F4}"/>
+                </a:ext>
+              </a:extLst>
+            </p:cNvPr>
+            <p:cNvPicPr>
+              <a:picLocks noChangeAspect="1"/>
+            </p:cNvPicPr>
+            <p:nvPr/>
+          </p:nvPicPr>
+          <p:blipFill>
+            <a:blip r:embed="rId2">
+              <a:extLst>
+                <a:ext uri="{28A0092B-C50C-407E-A947-70E740481C1C}">
+                  <a14:useLocalDpi xmlns:a14="http://schemas.microsoft.com/office/drawing/2010/main" val="0"/>
+                </a:ext>
+              </a:extLst>
+            </a:blip>
+            <a:stretch>
+              <a:fillRect/>
+            </a:stretch>
+          </p:blipFill>
+          <p:spPr>
+            <a:xfrm>
+              <a:off x="0" y="963168"/>
+              <a:ext cx="12192000" cy="4931664"/>
+            </a:xfrm>
+            <a:prstGeom prst="rect">
+              <a:avLst/>
+            </a:prstGeom>
+          </p:spPr>
+        </p:pic>
+        <p:pic>
+          <p:nvPicPr>
+            <p:cNvPr id="7" name="図 6">
+              <a:extLst>
+                <a:ext uri="{FF2B5EF4-FFF2-40B4-BE49-F238E27FC236}">
+                  <a16:creationId xmlns:a16="http://schemas.microsoft.com/office/drawing/2014/main" id="{BB8BD5A0-B261-A767-8B0F-F9B4418B0802}"/>
+                </a:ext>
+              </a:extLst>
+            </p:cNvPr>
+            <p:cNvPicPr>
+              <a:picLocks noChangeAspect="1"/>
+            </p:cNvPicPr>
+            <p:nvPr/>
+          </p:nvPicPr>
+          <p:blipFill>
+            <a:blip r:embed="rId3">
+              <a:extLst>
+                <a:ext uri="{28A0092B-C50C-407E-A947-70E740481C1C}">
+                  <a14:useLocalDpi xmlns:a14="http://schemas.microsoft.com/office/drawing/2010/main" val="0"/>
+                </a:ext>
+              </a:extLst>
+            </a:blip>
+            <a:srcRect l="846" r="1"/>
+            <a:stretch>
+              <a:fillRect/>
+            </a:stretch>
+          </p:blipFill>
+          <p:spPr>
+            <a:xfrm>
+              <a:off x="6995160" y="1124451"/>
+              <a:ext cx="5047207" cy="4622480"/>
+            </a:xfrm>
+            <a:prstGeom prst="rect">
+              <a:avLst/>
+            </a:prstGeom>
+          </p:spPr>
+        </p:pic>
+        <p:sp>
+          <p:nvSpPr>
+            <p:cNvPr id="8" name="楕円 7">
+              <a:extLst>
+                <a:ext uri="{FF2B5EF4-FFF2-40B4-BE49-F238E27FC236}">
+                  <a16:creationId xmlns:a16="http://schemas.microsoft.com/office/drawing/2014/main" id="{011226DD-5830-52B6-9736-68277B7109B7}"/>
+                </a:ext>
+              </a:extLst>
+            </p:cNvPr>
+            <p:cNvSpPr/>
+            <p:nvPr/>
+          </p:nvSpPr>
+          <p:spPr>
+            <a:xfrm>
+              <a:off x="9557887" y="2695073"/>
+              <a:ext cx="433137" cy="442762"/>
+            </a:xfrm>
+            <a:prstGeom prst="ellipse">
+              <a:avLst/>
+            </a:prstGeom>
+            <a:noFill/>
+            <a:ln w="38100">
+              <a:solidFill>
+                <a:srgbClr val="FF0000"/>
+              </a:solidFill>
+              <a:prstDash val="sysDash"/>
+            </a:ln>
+          </p:spPr>
+          <p:style>
+            <a:lnRef idx="2">
+              <a:schemeClr val="accent1">
+                <a:shade val="15000"/>
+              </a:schemeClr>
+            </a:lnRef>
+            <a:fillRef idx="1">
+              <a:schemeClr val="accent1"/>
+            </a:fillRef>
+            <a:effectRef idx="0">
+              <a:schemeClr val="accent1"/>
+            </a:effectRef>
+            <a:fontRef idx="minor">
+              <a:schemeClr val="lt1"/>
+            </a:fontRef>
+          </p:style>
+          <p:txBody>
+            <a:bodyPr rtlCol="0" anchor="ctr"/>
+            <a:lstStyle/>
+            <a:p>
+              <a:pPr algn="ctr"/>
+              <a:endParaRPr lang="en-US"/>
+            </a:p>
+          </p:txBody>
+        </p:sp>
+        <p:sp>
+          <p:nvSpPr>
+            <p:cNvPr id="9" name="テキスト ボックス 8">
+              <a:extLst>
+                <a:ext uri="{FF2B5EF4-FFF2-40B4-BE49-F238E27FC236}">
+                  <a16:creationId xmlns:a16="http://schemas.microsoft.com/office/drawing/2014/main" id="{F1193410-3FE7-7535-C82D-24114DE237D5}"/>
+                </a:ext>
+              </a:extLst>
+            </p:cNvPr>
+            <p:cNvSpPr txBox="1"/>
+            <p:nvPr/>
+          </p:nvSpPr>
+          <p:spPr>
+            <a:xfrm>
+              <a:off x="9908699" y="3067528"/>
+              <a:ext cx="1107996" cy="369332"/>
+            </a:xfrm>
+            <a:prstGeom prst="rect">
+              <a:avLst/>
+            </a:prstGeom>
+            <a:noFill/>
+            <a:ln w="28575">
+              <a:solidFill>
+                <a:srgbClr val="FF0000"/>
+              </a:solidFill>
+            </a:ln>
+          </p:spPr>
+          <p:txBody>
+            <a:bodyPr wrap="none" rtlCol="0">
+              <a:spAutoFit/>
+            </a:bodyPr>
+            <a:lstStyle/>
+            <a:p>
+              <a:r>
+                <a:rPr lang="ja-JP" altLang="en-US" b="1" dirty="0">
+                  <a:latin typeface="BIZ UDPゴシック" panose="020B0400000000000000" pitchFamily="50" charset="-128"/>
+                  <a:ea typeface="BIZ UDPゴシック" panose="020B0400000000000000" pitchFamily="50" charset="-128"/>
+                </a:rPr>
+                <a:t>講演会場</a:t>
+              </a:r>
+              <a:endParaRPr lang="en-US" b="1" dirty="0">
+                <a:latin typeface="BIZ UDPゴシック" panose="020B0400000000000000" pitchFamily="50" charset="-128"/>
+                <a:ea typeface="BIZ UDPゴシック" panose="020B0400000000000000" pitchFamily="50" charset="-128"/>
+              </a:endParaRPr>
+            </a:p>
+          </p:txBody>
+        </p:sp>
+      </p:grpSp>
+    </p:spTree>
+    <p:extLst>
+      <p:ext uri="{BB962C8B-B14F-4D97-AF65-F5344CB8AC3E}">
+        <p14:creationId xmlns:p14="http://schemas.microsoft.com/office/powerpoint/2010/main" val="935779898"/>
+      </p:ext>
+    </p:extLst>
+  </p:cSld>
+  <p:clrMapOvr>
+    <a:masterClrMapping/>
+  </p:clrMapOvr>
+</p:sld>
+</file>
+
 <file path=ppt/theme/theme1.xml><?xml version="1.0" encoding="utf-8"?>
 <a:theme xmlns:a="http://schemas.openxmlformats.org/drawingml/2006/main" name="Office テーマ">
   <a:themeElements>
